--- a/classes/parte-5-explotacion-de-sistemas-y-binarios/140-ctfs-de-pwn-e-ingenieria-inversa/clase-140-presentacion.pptx
+++ b/classes/parte-5-explotacion-de-sistemas-y-binarios/140-ctfs-de-pwn-e-ingenieria-inversa/clase-140-presentacion.pptx
@@ -17,6 +17,9 @@
     <p:sldId id="265" r:id="rId16"/>
     <p:sldId id="266" r:id="rId17"/>
     <p:sldId id="267" r:id="rId18"/>
+    <p:sldId id="268" r:id="rId19"/>
+    <p:sldId id="269" r:id="rId20"/>
+    <p:sldId id="270" r:id="rId21"/>
   </p:sldIdLst>
   <p:sldSz cx="9144000" cy="6858000" type="screen4x3"/>
   <p:notesSz cx="6858000" cy="9144000"/>
@@ -3198,7 +3201,7 @@
                   <a:srgbClr val="0B3D2E"/>
                 </a:solidFill>
               </a:rPr>
-              <a:t>⚠️ Errores comunes</a:t>
+              <a:t>✍️ Ejercicios</a:t>
             </a:r>
           </a:p>
         </p:txBody>
@@ -3236,67 +3239,82 @@
                   <a:srgbClr val="22282E"/>
                 </a:solidFill>
               </a:rPr>
-              <a:t>•  Funciona local, no remoto — libc distinta; usa la del reto y recalcula offsets</a:t>
-            </a:r>
-          </a:p>
-          <a:p>
-            <a:pPr>
-              <a:spcAft>
-                <a:spcPts val="600"/>
-              </a:spcAft>
-            </a:pPr>
-            <a:r>
-              <a:rPr sz="1500">
-                <a:solidFill>
-                  <a:srgbClr val="22282E"/>
-                </a:solidFill>
-              </a:rPr>
-              <a:t>•  Te atascas horas en un reto — Vuelve al triage; quizá la categoría/técnica es otra</a:t>
-            </a:r>
-          </a:p>
-          <a:p>
-            <a:pPr>
-              <a:spcAft>
-                <a:spcPts val="600"/>
-              </a:spcAft>
-            </a:pPr>
-            <a:r>
-              <a:rPr sz="1500">
-                <a:solidFill>
-                  <a:srgbClr val="22282E"/>
-                </a:solidFill>
-              </a:rPr>
-              <a:t>•  Flag no aparece — Puede estar en un fichero; ejecuta cat flag.txt tras la shell</a:t>
-            </a:r>
-          </a:p>
-          <a:p>
-            <a:pPr>
-              <a:spcAft>
-                <a:spcPts val="600"/>
-              </a:spcAft>
-            </a:pPr>
-            <a:r>
-              <a:rPr sz="1500">
-                <a:solidFill>
-                  <a:srgbClr val="22282E"/>
-                </a:solidFill>
-              </a:rPr>
-              <a:t>•  Timing/EOF con el servidor — Sincroniza con recvuntil/sendlineafter</a:t>
-            </a:r>
-          </a:p>
-          <a:p>
-            <a:pPr>
-              <a:spcAft>
-                <a:spcPts val="600"/>
-              </a:spcAft>
-            </a:pPr>
-            <a:r>
-              <a:rPr sz="1500">
-                <a:solidFill>
-                  <a:srgbClr val="22282E"/>
-                </a:solidFill>
-              </a:rPr>
-              <a:t>•  Copias exploits sin entender — No aprendes; resuelve primero, luego contrasta writeups</a:t>
+              <a:t>•  Resuelve un reto de picoCTF de la categoría Binary Exploitation y documenta el flujo.</a:t>
+            </a:r>
+          </a:p>
+          <a:p>
+            <a:pPr>
+              <a:spcAft>
+                <a:spcPts val="600"/>
+              </a:spcAft>
+            </a:pPr>
+            <a:r>
+              <a:rPr sz="1500">
+                <a:solidFill>
+                  <a:srgbClr val="22282E"/>
+                </a:solidFill>
+              </a:rPr>
+              <a:t>•  Resuelve un crackme de crackmes.one y publica (para ti) el razonamiento.</a:t>
+            </a:r>
+          </a:p>
+          <a:p>
+            <a:pPr>
+              <a:spcAft>
+                <a:spcPts val="600"/>
+              </a:spcAft>
+            </a:pPr>
+            <a:r>
+              <a:rPr sz="1500">
+                <a:solidFill>
+                  <a:srgbClr val="22282E"/>
+                </a:solidFill>
+              </a:rPr>
+              <a:t>•  Adapta tu plantilla pwntools para gestionar un prompt con sendlineafter.</a:t>
+            </a:r>
+          </a:p>
+          <a:p>
+            <a:pPr>
+              <a:spcAft>
+                <a:spcPts val="600"/>
+              </a:spcAft>
+            </a:pPr>
+            <a:r>
+              <a:rPr sz="1500">
+                <a:solidFill>
+                  <a:srgbClr val="22282E"/>
+                </a:solidFill>
+              </a:rPr>
+              <a:t>•  Identifica la libc de un reto remoto por un leak y ajústala.</a:t>
+            </a:r>
+          </a:p>
+          <a:p>
+            <a:pPr>
+              <a:spcAft>
+                <a:spcPts val="600"/>
+              </a:spcAft>
+            </a:pPr>
+            <a:r>
+              <a:rPr sz="1500">
+                <a:solidFill>
+                  <a:srgbClr val="22282E"/>
+                </a:solidFill>
+              </a:rPr>
+              <a:t>•  Completa dos retos de ROP Emporium (ret2win, split).</a:t>
+            </a:r>
+          </a:p>
+          <a:p>
+            <a:pPr>
+              <a:spcAft>
+                <a:spcPts val="600"/>
+              </a:spcAft>
+            </a:pPr>
+            <a:r>
+              <a:rPr sz="1500">
+                <a:solidFill>
+                  <a:srgbClr val="22282E"/>
+                </a:solidFill>
+              </a:rPr>
+              <a:t>•  Lee un writeup avanzado y resume una técnica nueva que aprendiste.</a:t>
             </a:r>
           </a:p>
         </p:txBody>
@@ -3347,7 +3365,7 @@
                   <a:srgbClr val="0B3D2E"/>
                 </a:solidFill>
               </a:rPr>
-              <a:t>❓ Preguntas frecuentes</a:t>
+              <a:t>📝 Reto verificable</a:t>
             </a:r>
           </a:p>
         </p:txBody>
@@ -3385,82 +3403,52 @@
                   <a:srgbClr val="22282E"/>
                 </a:solidFill>
               </a:rPr>
-              <a:t>•  ❓ ¿Por dónde empiezo? picoCTF y pwn.college son ideales para principiantes; ROP Emporium para ROP;</a:t>
-            </a:r>
-          </a:p>
-          <a:p>
-            <a:pPr>
-              <a:spcAft>
-                <a:spcPts val="600"/>
-              </a:spcAft>
-            </a:pPr>
-            <a:r>
-              <a:rPr sz="1500">
-                <a:solidFill>
-                  <a:srgbClr val="22282E"/>
-                </a:solidFill>
-              </a:rPr>
-              <a:t>•  pwnable.kr para variedad.</a:t>
-            </a:r>
-          </a:p>
-          <a:p>
-            <a:pPr>
-              <a:spcAft>
-                <a:spcPts val="600"/>
-              </a:spcAft>
-            </a:pPr>
-            <a:r>
-              <a:rPr sz="1500">
-                <a:solidFill>
-                  <a:srgbClr val="22282E"/>
-                </a:solidFill>
-              </a:rPr>
-              <a:t>•  ❓ ¿Está bien leer writeups? Sí, después de intentarlo. Son la forma más rápida de aprender técnicas</a:t>
-            </a:r>
-          </a:p>
-          <a:p>
-            <a:pPr>
-              <a:spcAft>
-                <a:spcPts val="600"/>
-              </a:spcAft>
-            </a:pPr>
-            <a:r>
-              <a:rPr sz="1500">
-                <a:solidFill>
-                  <a:srgbClr val="22282E"/>
-                </a:solidFill>
-              </a:rPr>
-              <a:t>•  nuevas.</a:t>
-            </a:r>
-          </a:p>
-          <a:p>
-            <a:pPr>
-              <a:spcAft>
-                <a:spcPts val="600"/>
-              </a:spcAft>
-            </a:pPr>
-            <a:r>
-              <a:rPr sz="1500">
-                <a:solidFill>
-                  <a:srgbClr val="22282E"/>
-                </a:solidFill>
-              </a:rPr>
-              <a:t>•  ❓ ¿Los CTF sirven para el trabajo real? Mucho: entrenan las mismas primitivas y mentalidad del</a:t>
-            </a:r>
-          </a:p>
-          <a:p>
-            <a:pPr>
-              <a:spcAft>
-                <a:spcPts val="600"/>
-              </a:spcAft>
-            </a:pPr>
-            <a:r>
-              <a:rPr sz="1500">
-                <a:solidFill>
-                  <a:srgbClr val="22282E"/>
-                </a:solidFill>
-              </a:rPr>
-              <a:t>•  research de vulnerabilidades y el pentesting avanzado.</a:t>
+              <a:t>•  Resuelve de principio a fin un reto de pwn con objetivo remoto (de una plataforma de práctica),</a:t>
+            </a:r>
+          </a:p>
+          <a:p>
+            <a:pPr>
+              <a:spcAft>
+                <a:spcPts val="600"/>
+              </a:spcAft>
+            </a:pPr>
+            <a:r>
+              <a:rPr sz="1500">
+                <a:solidFill>
+                  <a:srgbClr val="22282E"/>
+                </a:solidFill>
+              </a:rPr>
+              <a:t>•  obteniendo la flag, y entrega tu exploit + writeup.</a:t>
+            </a:r>
+          </a:p>
+          <a:p>
+            <a:pPr>
+              <a:spcAft>
+                <a:spcPts val="600"/>
+              </a:spcAft>
+            </a:pPr>
+            <a:r>
+              <a:rPr sz="1500">
+                <a:solidFill>
+                  <a:srgbClr val="22282E"/>
+                </a:solidFill>
+              </a:rPr>
+              <a:t>•  Criterio de aceptación: tu exploit.py REMOTE recupera la flag del servidor y tu writeup explica el</a:t>
+            </a:r>
+          </a:p>
+          <a:p>
+            <a:pPr>
+              <a:spcAft>
+                <a:spcPts val="600"/>
+              </a:spcAft>
+            </a:pPr>
+            <a:r>
+              <a:rPr sz="1500">
+                <a:solidFill>
+                  <a:srgbClr val="22282E"/>
+                </a:solidFill>
+              </a:rPr>
+              <a:t>•  bug, la primitiva y la cadena de explotación de forma reproducible.</a:t>
             </a:r>
           </a:p>
         </p:txBody>
@@ -3511,7 +3499,7 @@
                   <a:srgbClr val="0B3D2E"/>
                 </a:solidFill>
               </a:rPr>
-              <a:t>🔗 Referencias</a:t>
+              <a:t>⚠️ Errores comunes</a:t>
             </a:r>
           </a:p>
         </p:txBody>
@@ -3549,6 +3537,319 @@
                   <a:srgbClr val="22282E"/>
                 </a:solidFill>
               </a:rPr>
+              <a:t>•  Funciona local, no remoto — libc distinta; usa la del reto y recalcula offsets</a:t>
+            </a:r>
+          </a:p>
+          <a:p>
+            <a:pPr>
+              <a:spcAft>
+                <a:spcPts val="600"/>
+              </a:spcAft>
+            </a:pPr>
+            <a:r>
+              <a:rPr sz="1500">
+                <a:solidFill>
+                  <a:srgbClr val="22282E"/>
+                </a:solidFill>
+              </a:rPr>
+              <a:t>•  Te atascas horas en un reto — Vuelve al triage; quizá la categoría/técnica es otra</a:t>
+            </a:r>
+          </a:p>
+          <a:p>
+            <a:pPr>
+              <a:spcAft>
+                <a:spcPts val="600"/>
+              </a:spcAft>
+            </a:pPr>
+            <a:r>
+              <a:rPr sz="1500">
+                <a:solidFill>
+                  <a:srgbClr val="22282E"/>
+                </a:solidFill>
+              </a:rPr>
+              <a:t>•  Flag no aparece — Puede estar en un fichero; ejecuta cat flag.txt tras la shell</a:t>
+            </a:r>
+          </a:p>
+          <a:p>
+            <a:pPr>
+              <a:spcAft>
+                <a:spcPts val="600"/>
+              </a:spcAft>
+            </a:pPr>
+            <a:r>
+              <a:rPr sz="1500">
+                <a:solidFill>
+                  <a:srgbClr val="22282E"/>
+                </a:solidFill>
+              </a:rPr>
+              <a:t>•  Timing/EOF con el servidor — Sincroniza con recvuntil/sendlineafter</a:t>
+            </a:r>
+          </a:p>
+          <a:p>
+            <a:pPr>
+              <a:spcAft>
+                <a:spcPts val="600"/>
+              </a:spcAft>
+            </a:pPr>
+            <a:r>
+              <a:rPr sz="1500">
+                <a:solidFill>
+                  <a:srgbClr val="22282E"/>
+                </a:solidFill>
+              </a:rPr>
+              <a:t>•  Copias exploits sin entender — No aprendes; resuelve primero, luego contrasta writeups</a:t>
+            </a:r>
+          </a:p>
+        </p:txBody>
+      </p:sp>
+    </p:spTree>
+  </p:cSld>
+  <p:clrMapOvr>
+    <a:masterClrMapping/>
+  </p:clrMapOvr>
+</p:sld>
+</file>
+
+<file path=ppt/slides/slide13.xml><?xml version="1.0" encoding="utf-8"?>
+<p:sld xmlns:a="http://schemas.openxmlformats.org/drawingml/2006/main" xmlns:p="http://schemas.openxmlformats.org/presentationml/2006/main" xmlns:r="http://schemas.openxmlformats.org/officeDocument/2006/relationships">
+  <p:cSld>
+    <p:spTree>
+      <p:nvGrpSpPr>
+        <p:cNvPr id="1" name=""/>
+        <p:cNvGrpSpPr/>
+        <p:nvPr/>
+      </p:nvGrpSpPr>
+      <p:grpSpPr/>
+      <p:sp>
+        <p:nvSpPr>
+          <p:cNvPr id="2" name="TextBox 1"/>
+          <p:cNvSpPr txBox="1"/>
+          <p:nvPr/>
+        </p:nvSpPr>
+        <p:spPr>
+          <a:xfrm>
+            <a:off x="457200" y="320040"/>
+            <a:ext cx="8229600" cy="822960"/>
+          </a:xfrm>
+          <a:prstGeom prst="rect">
+            <a:avLst/>
+          </a:prstGeom>
+          <a:noFill/>
+        </p:spPr>
+        <p:txBody>
+          <a:bodyPr wrap="square">
+            <a:spAutoFit/>
+          </a:bodyPr>
+          <a:lstStyle/>
+          <a:p>
+            <a:r>
+              <a:rPr sz="2600" b="1">
+                <a:solidFill>
+                  <a:srgbClr val="0B3D2E"/>
+                </a:solidFill>
+              </a:rPr>
+              <a:t>❓ Preguntas frecuentes</a:t>
+            </a:r>
+          </a:p>
+        </p:txBody>
+      </p:sp>
+      <p:sp>
+        <p:nvSpPr>
+          <p:cNvPr id="3" name="TextBox 2"/>
+          <p:cNvSpPr txBox="1"/>
+          <p:nvPr/>
+        </p:nvSpPr>
+        <p:spPr>
+          <a:xfrm>
+            <a:off x="457200" y="1280160"/>
+            <a:ext cx="8229600" cy="4937760"/>
+          </a:xfrm>
+          <a:prstGeom prst="rect">
+            <a:avLst/>
+          </a:prstGeom>
+          <a:noFill/>
+        </p:spPr>
+        <p:txBody>
+          <a:bodyPr wrap="square">
+            <a:spAutoFit/>
+          </a:bodyPr>
+          <a:lstStyle/>
+          <a:p>
+            <a:pPr>
+              <a:spcAft>
+                <a:spcPts val="600"/>
+              </a:spcAft>
+            </a:pPr>
+            <a:r>
+              <a:rPr sz="1500">
+                <a:solidFill>
+                  <a:srgbClr val="22282E"/>
+                </a:solidFill>
+              </a:rPr>
+              <a:t>•  ❓ ¿Por dónde empiezo? picoCTF y pwn.college son ideales para principiantes; ROP Emporium para ROP;</a:t>
+            </a:r>
+          </a:p>
+          <a:p>
+            <a:pPr>
+              <a:spcAft>
+                <a:spcPts val="600"/>
+              </a:spcAft>
+            </a:pPr>
+            <a:r>
+              <a:rPr sz="1500">
+                <a:solidFill>
+                  <a:srgbClr val="22282E"/>
+                </a:solidFill>
+              </a:rPr>
+              <a:t>•  pwnable.kr para variedad.</a:t>
+            </a:r>
+          </a:p>
+          <a:p>
+            <a:pPr>
+              <a:spcAft>
+                <a:spcPts val="600"/>
+              </a:spcAft>
+            </a:pPr>
+            <a:r>
+              <a:rPr sz="1500">
+                <a:solidFill>
+                  <a:srgbClr val="22282E"/>
+                </a:solidFill>
+              </a:rPr>
+              <a:t>•  ❓ ¿Está bien leer writeups? Sí, después de intentarlo. Son la forma más rápida de aprender técnicas</a:t>
+            </a:r>
+          </a:p>
+          <a:p>
+            <a:pPr>
+              <a:spcAft>
+                <a:spcPts val="600"/>
+              </a:spcAft>
+            </a:pPr>
+            <a:r>
+              <a:rPr sz="1500">
+                <a:solidFill>
+                  <a:srgbClr val="22282E"/>
+                </a:solidFill>
+              </a:rPr>
+              <a:t>•  nuevas.</a:t>
+            </a:r>
+          </a:p>
+          <a:p>
+            <a:pPr>
+              <a:spcAft>
+                <a:spcPts val="600"/>
+              </a:spcAft>
+            </a:pPr>
+            <a:r>
+              <a:rPr sz="1500">
+                <a:solidFill>
+                  <a:srgbClr val="22282E"/>
+                </a:solidFill>
+              </a:rPr>
+              <a:t>•  ❓ ¿Los CTF sirven para el trabajo real? Mucho: entrenan las mismas primitivas y mentalidad del</a:t>
+            </a:r>
+          </a:p>
+          <a:p>
+            <a:pPr>
+              <a:spcAft>
+                <a:spcPts val="600"/>
+              </a:spcAft>
+            </a:pPr>
+            <a:r>
+              <a:rPr sz="1500">
+                <a:solidFill>
+                  <a:srgbClr val="22282E"/>
+                </a:solidFill>
+              </a:rPr>
+              <a:t>•  research de vulnerabilidades y el pentesting avanzado.</a:t>
+            </a:r>
+          </a:p>
+        </p:txBody>
+      </p:sp>
+    </p:spTree>
+  </p:cSld>
+  <p:clrMapOvr>
+    <a:masterClrMapping/>
+  </p:clrMapOvr>
+</p:sld>
+</file>
+
+<file path=ppt/slides/slide14.xml><?xml version="1.0" encoding="utf-8"?>
+<p:sld xmlns:a="http://schemas.openxmlformats.org/drawingml/2006/main" xmlns:p="http://schemas.openxmlformats.org/presentationml/2006/main" xmlns:r="http://schemas.openxmlformats.org/officeDocument/2006/relationships">
+  <p:cSld>
+    <p:spTree>
+      <p:nvGrpSpPr>
+        <p:cNvPr id="1" name=""/>
+        <p:cNvGrpSpPr/>
+        <p:nvPr/>
+      </p:nvGrpSpPr>
+      <p:grpSpPr/>
+      <p:sp>
+        <p:nvSpPr>
+          <p:cNvPr id="2" name="TextBox 1"/>
+          <p:cNvSpPr txBox="1"/>
+          <p:nvPr/>
+        </p:nvSpPr>
+        <p:spPr>
+          <a:xfrm>
+            <a:off x="457200" y="320040"/>
+            <a:ext cx="8229600" cy="822960"/>
+          </a:xfrm>
+          <a:prstGeom prst="rect">
+            <a:avLst/>
+          </a:prstGeom>
+          <a:noFill/>
+        </p:spPr>
+        <p:txBody>
+          <a:bodyPr wrap="square">
+            <a:spAutoFit/>
+          </a:bodyPr>
+          <a:lstStyle/>
+          <a:p>
+            <a:r>
+              <a:rPr sz="2600" b="1">
+                <a:solidFill>
+                  <a:srgbClr val="0B3D2E"/>
+                </a:solidFill>
+              </a:rPr>
+              <a:t>🔗 Referencias</a:t>
+            </a:r>
+          </a:p>
+        </p:txBody>
+      </p:sp>
+      <p:sp>
+        <p:nvSpPr>
+          <p:cNvPr id="3" name="TextBox 2"/>
+          <p:cNvSpPr txBox="1"/>
+          <p:nvPr/>
+        </p:nvSpPr>
+        <p:spPr>
+          <a:xfrm>
+            <a:off x="457200" y="1280160"/>
+            <a:ext cx="8229600" cy="4937760"/>
+          </a:xfrm>
+          <a:prstGeom prst="rect">
+            <a:avLst/>
+          </a:prstGeom>
+          <a:noFill/>
+        </p:spPr>
+        <p:txBody>
+          <a:bodyPr wrap="square">
+            <a:spAutoFit/>
+          </a:bodyPr>
+          <a:lstStyle/>
+          <a:p>
+            <a:pPr>
+              <a:spcAft>
+                <a:spcPts val="600"/>
+              </a:spcAft>
+            </a:pPr>
+            <a:r>
+              <a:rPr sz="1500">
+                <a:solidFill>
+                  <a:srgbClr val="22282E"/>
+                </a:solidFill>
+              </a:rPr>
               <a:t>•  pwn.college — &lt;https://pwn.college/&gt;</a:t>
             </a:r>
           </a:p>
@@ -3599,6 +3900,81 @@
           </a:p>
         </p:txBody>
       </p:sp>
+    </p:spTree>
+  </p:cSld>
+  <p:clrMapOvr>
+    <a:masterClrMapping/>
+  </p:clrMapOvr>
+</p:sld>
+</file>
+
+<file path=ppt/slides/slide15.xml><?xml version="1.0" encoding="utf-8"?>
+<p:sld xmlns:a="http://schemas.openxmlformats.org/drawingml/2006/main" xmlns:p="http://schemas.openxmlformats.org/presentationml/2006/main" xmlns:r="http://schemas.openxmlformats.org/officeDocument/2006/relationships">
+  <p:cSld>
+    <p:spTree>
+      <p:nvGrpSpPr>
+        <p:cNvPr id="1" name=""/>
+        <p:cNvGrpSpPr/>
+        <p:nvPr/>
+      </p:nvGrpSpPr>
+      <p:grpSpPr/>
+      <p:sp>
+        <p:nvSpPr>
+          <p:cNvPr id="2" name="TextBox 1"/>
+          <p:cNvSpPr txBox="1"/>
+          <p:nvPr/>
+        </p:nvSpPr>
+        <p:spPr>
+          <a:xfrm>
+            <a:off x="457200" y="274320"/>
+            <a:ext cx="8229600" cy="640080"/>
+          </a:xfrm>
+          <a:prstGeom prst="rect">
+            <a:avLst/>
+          </a:prstGeom>
+          <a:noFill/>
+        </p:spPr>
+        <p:txBody>
+          <a:bodyPr wrap="square">
+            <a:spAutoFit/>
+          </a:bodyPr>
+          <a:lstStyle/>
+          <a:p>
+            <a:r>
+              <a:rPr sz="2200" b="1">
+                <a:solidFill>
+                  <a:srgbClr val="0B3D2E"/>
+                </a:solidFill>
+              </a:rPr>
+              <a:t>Diagrama de la clase</a:t>
+            </a:r>
+          </a:p>
+        </p:txBody>
+      </p:sp>
+      <p:pic>
+        <p:nvPicPr>
+          <p:cNvPr id="3" name="Picture 2" descr="03aa37babc5929e0.png"/>
+          <p:cNvPicPr>
+            <a:picLocks noChangeAspect="1"/>
+          </p:cNvPicPr>
+          <p:nvPr/>
+        </p:nvPicPr>
+        <p:blipFill>
+          <a:blip r:embed="rId2"/>
+          <a:stretch>
+            <a:fillRect/>
+          </a:stretch>
+        </p:blipFill>
+        <p:spPr>
+          <a:xfrm>
+            <a:off x="457200" y="3497580"/>
+            <a:ext cx="8229600" cy="502920"/>
+          </a:xfrm>
+          <a:prstGeom prst="rect">
+            <a:avLst/>
+          </a:prstGeom>
+        </p:spPr>
+      </p:pic>
     </p:spTree>
   </p:cSld>
   <p:clrMapOvr>
@@ -4122,7 +4498,7 @@
                   <a:srgbClr val="0B3D2E"/>
                 </a:solidFill>
               </a:rPr>
-              <a:t>📖 Definiciones y características</a:t>
+              <a:t>🧠 Explicación en profundidad</a:t>
             </a:r>
           </a:p>
         </p:txBody>
@@ -4160,97 +4536,97 @@
                   <a:srgbClr val="22282E"/>
                 </a:solidFill>
               </a:rPr>
-              <a:t>•  CTF (Capture The Flag): competencia de seguridad con retos que ocultan una "flag". Clave: pwn y</a:t>
-            </a:r>
-          </a:p>
-          <a:p>
-            <a:pPr>
-              <a:spcAft>
-                <a:spcPts val="600"/>
-              </a:spcAft>
-            </a:pPr>
-            <a:r>
-              <a:rPr sz="1500">
-                <a:solidFill>
-                  <a:srgbClr val="22282E"/>
-                </a:solidFill>
-              </a:rPr>
-              <a:t>•  rev son las categorías de esta parte.</a:t>
-            </a:r>
-          </a:p>
-          <a:p>
-            <a:pPr>
-              <a:spcAft>
-                <a:spcPts val="600"/>
-              </a:spcAft>
-            </a:pPr>
-            <a:r>
-              <a:rPr sz="1500">
-                <a:solidFill>
-                  <a:srgbClr val="22282E"/>
-                </a:solidFill>
-              </a:rPr>
-              <a:t>•  Jeopardy vs Attack-Defense: por retos independientes vs. defender/atacar servicios en vivo.</a:t>
-            </a:r>
-          </a:p>
-          <a:p>
-            <a:pPr>
-              <a:spcAft>
-                <a:spcPts val="600"/>
-              </a:spcAft>
-            </a:pPr>
-            <a:r>
-              <a:rPr sz="1500">
-                <a:solidFill>
-                  <a:srgbClr val="22282E"/>
-                </a:solidFill>
-              </a:rPr>
-              <a:t>•  Clave: el formato cambia la estrategia y el ritmo.</a:t>
-            </a:r>
-          </a:p>
-          <a:p>
-            <a:pPr>
-              <a:spcAft>
-                <a:spcPts val="600"/>
-              </a:spcAft>
-            </a:pPr>
-            <a:r>
-              <a:rPr sz="1500">
-                <a:solidFill>
-                  <a:srgbClr val="22282E"/>
-                </a:solidFill>
-              </a:rPr>
-              <a:t>•  Triage de reto: primeras acciones (file, checksec, strings, abrir en Ghidra) para orientar.</a:t>
-            </a:r>
-          </a:p>
-          <a:p>
-            <a:pPr>
-              <a:spcAft>
-                <a:spcPts val="600"/>
-              </a:spcAft>
-            </a:pPr>
-            <a:r>
-              <a:rPr sz="1500">
-                <a:solidFill>
-                  <a:srgbClr val="22282E"/>
-                </a:solidFill>
-              </a:rPr>
-              <a:t>•  Clave: decide técnica y esfuerzo.</a:t>
-            </a:r>
-          </a:p>
-          <a:p>
-            <a:pPr>
-              <a:spcAft>
-                <a:spcPts val="600"/>
-              </a:spcAft>
-            </a:pPr>
-            <a:r>
-              <a:rPr sz="1500">
-                <a:solidFill>
-                  <a:srgbClr val="22282E"/>
-                </a:solidFill>
-              </a:rPr>
-              <a:t>•  Flag: cadena objetivo, típicamente flag{...} o ctf{...}. Clave: se obtiene ejecutando código,</a:t>
+              <a:t>•  Los CTF (Capture The Flag) son competiciones de seguridad donde se resuelven retos para</a:t>
+            </a:r>
+          </a:p>
+          <a:p>
+            <a:pPr>
+              <a:spcAft>
+                <a:spcPts val="600"/>
+              </a:spcAft>
+            </a:pPr>
+            <a:r>
+              <a:rPr sz="1500">
+                <a:solidFill>
+                  <a:srgbClr val="22282E"/>
+                </a:solidFill>
+              </a:rPr>
+              <a:t>•  obtener flags (cadenas secretas que prueban el éxito), y son el mejor entorno para practicar la</a:t>
+            </a:r>
+          </a:p>
+          <a:p>
+            <a:pPr>
+              <a:spcAft>
+                <a:spcPts val="600"/>
+              </a:spcAft>
+            </a:pPr>
+            <a:r>
+              <a:rPr sz="1500">
+                <a:solidFill>
+                  <a:srgbClr val="22282E"/>
+                </a:solidFill>
+              </a:rPr>
+              <a:t>•  explotación de binarios: legal, seguro y con dificultad graduada. Toda esta parte se consolida</a:t>
+            </a:r>
+          </a:p>
+          <a:p>
+            <a:pPr>
+              <a:spcAft>
+                <a:spcPts val="600"/>
+              </a:spcAft>
+            </a:pPr>
+            <a:r>
+              <a:rPr sz="1500">
+                <a:solidFill>
+                  <a:srgbClr val="22282E"/>
+                </a:solidFill>
+              </a:rPr>
+              <a:t>•  resolviendo retos de las categorías pwn (explotación de binarios) y rev (ingeniería inversa),</a:t>
+            </a:r>
+          </a:p>
+          <a:p>
+            <a:pPr>
+              <a:spcAft>
+                <a:spcPts val="600"/>
+              </a:spcAft>
+            </a:pPr>
+            <a:r>
+              <a:rPr sz="1500">
+                <a:solidFill>
+                  <a:srgbClr val="22282E"/>
+                </a:solidFill>
+              </a:rPr>
+              <a:t>•  que se solapan constantemente —para explotar un binario hay que entenderlo primero, y entenderlo es</a:t>
+            </a:r>
+          </a:p>
+          <a:p>
+            <a:pPr>
+              <a:spcAft>
+                <a:spcPts val="600"/>
+              </a:spcAft>
+            </a:pPr>
+            <a:r>
+              <a:rPr sz="1500">
+                <a:solidFill>
+                  <a:srgbClr val="22282E"/>
+                </a:solidFill>
+              </a:rPr>
+              <a:t>•  reversarlo—. La clase cierra la parte enseñando a aplicar todo lo aprendido bajo la presión y el</a:t>
+            </a:r>
+          </a:p>
+          <a:p>
+            <a:pPr>
+              <a:spcAft>
+                <a:spcPts val="600"/>
+              </a:spcAft>
+            </a:pPr>
+            <a:r>
+              <a:rPr sz="1500">
+                <a:solidFill>
+                  <a:srgbClr val="22282E"/>
+                </a:solidFill>
+              </a:rPr>
+              <a:t>•  formato de una competición real, que es también como se entrenan y se contratan los profesionales del</a:t>
             </a:r>
           </a:p>
         </p:txBody>
@@ -4301,7 +4677,7 @@
                   <a:srgbClr val="0B3D2E"/>
                 </a:solidFill>
               </a:rPr>
-              <a:t>🧰 Herramientas y preparación</a:t>
+              <a:t>📖 Definiciones y características</a:t>
             </a:r>
           </a:p>
         </p:txBody>
@@ -4339,37 +4715,97 @@
                   <a:srgbClr val="22282E"/>
                 </a:solidFill>
               </a:rPr>
-              <a:t>•  pip install pwntools ROPgadget</a:t>
-            </a:r>
-          </a:p>
-          <a:p>
-            <a:pPr>
-              <a:spcAft>
-                <a:spcPts val="600"/>
-              </a:spcAft>
-            </a:pPr>
-            <a:r>
-              <a:rPr sz="1500">
-                <a:solidFill>
-                  <a:srgbClr val="22282E"/>
-                </a:solidFill>
-              </a:rPr>
-              <a:t>•  Plataformas legales de práctica: pwn.college, picoCTF, HackTheBox, pwnable.kr,</a:t>
-            </a:r>
-          </a:p>
-          <a:p>
-            <a:pPr>
-              <a:spcAft>
-                <a:spcPts val="600"/>
-              </a:spcAft>
-            </a:pPr>
-            <a:r>
-              <a:rPr sz="1500">
-                <a:solidFill>
-                  <a:srgbClr val="22282E"/>
-                </a:solidFill>
-              </a:rPr>
-              <a:t>•  ROP Emporium, crackmes.one.</a:t>
+              <a:t>•  CTF (Capture The Flag): competencia de seguridad con retos que ocultan una "flag". Clave: pwn y</a:t>
+            </a:r>
+          </a:p>
+          <a:p>
+            <a:pPr>
+              <a:spcAft>
+                <a:spcPts val="600"/>
+              </a:spcAft>
+            </a:pPr>
+            <a:r>
+              <a:rPr sz="1500">
+                <a:solidFill>
+                  <a:srgbClr val="22282E"/>
+                </a:solidFill>
+              </a:rPr>
+              <a:t>•  rev son las categorías de esta parte.</a:t>
+            </a:r>
+          </a:p>
+          <a:p>
+            <a:pPr>
+              <a:spcAft>
+                <a:spcPts val="600"/>
+              </a:spcAft>
+            </a:pPr>
+            <a:r>
+              <a:rPr sz="1500">
+                <a:solidFill>
+                  <a:srgbClr val="22282E"/>
+                </a:solidFill>
+              </a:rPr>
+              <a:t>•  Jeopardy vs Attack-Defense: por retos independientes vs. defender/atacar servicios en vivo.</a:t>
+            </a:r>
+          </a:p>
+          <a:p>
+            <a:pPr>
+              <a:spcAft>
+                <a:spcPts val="600"/>
+              </a:spcAft>
+            </a:pPr>
+            <a:r>
+              <a:rPr sz="1500">
+                <a:solidFill>
+                  <a:srgbClr val="22282E"/>
+                </a:solidFill>
+              </a:rPr>
+              <a:t>•  Clave: el formato cambia la estrategia y el ritmo.</a:t>
+            </a:r>
+          </a:p>
+          <a:p>
+            <a:pPr>
+              <a:spcAft>
+                <a:spcPts val="600"/>
+              </a:spcAft>
+            </a:pPr>
+            <a:r>
+              <a:rPr sz="1500">
+                <a:solidFill>
+                  <a:srgbClr val="22282E"/>
+                </a:solidFill>
+              </a:rPr>
+              <a:t>•  Triage de reto: primeras acciones (file, checksec, strings, abrir en Ghidra) para orientar.</a:t>
+            </a:r>
+          </a:p>
+          <a:p>
+            <a:pPr>
+              <a:spcAft>
+                <a:spcPts val="600"/>
+              </a:spcAft>
+            </a:pPr>
+            <a:r>
+              <a:rPr sz="1500">
+                <a:solidFill>
+                  <a:srgbClr val="22282E"/>
+                </a:solidFill>
+              </a:rPr>
+              <a:t>•  Clave: decide técnica y esfuerzo.</a:t>
+            </a:r>
+          </a:p>
+          <a:p>
+            <a:pPr>
+              <a:spcAft>
+                <a:spcPts val="600"/>
+              </a:spcAft>
+            </a:pPr>
+            <a:r>
+              <a:rPr sz="1500">
+                <a:solidFill>
+                  <a:srgbClr val="22282E"/>
+                </a:solidFill>
+              </a:rPr>
+              <a:t>•  Flag: cadena objetivo, típicamente flag{...} o ctf{...}. Clave: se obtiene ejecutando código,</a:t>
             </a:r>
           </a:p>
         </p:txBody>
@@ -4420,7 +4856,7 @@
                   <a:srgbClr val="0B3D2E"/>
                 </a:solidFill>
               </a:rPr>
-              <a:t>🧪 Laboratorio guiado</a:t>
+              <a:t>📔 Glosario</a:t>
             </a:r>
           </a:p>
         </p:txBody>
@@ -4458,97 +4894,97 @@
                   <a:srgbClr val="22282E"/>
                 </a:solidFill>
               </a:rPr>
-              <a:t>•  Triage de un reto de pwn descargado:</a:t>
-            </a:r>
-          </a:p>
-          <a:p>
-            <a:pPr>
-              <a:spcAft>
-                <a:spcPts val="600"/>
-              </a:spcAft>
-            </a:pPr>
-            <a:r>
-              <a:rPr sz="1500">
-                <a:solidFill>
-                  <a:srgbClr val="22282E"/>
-                </a:solidFill>
-              </a:rPr>
-              <a:t>•  file chall &amp;&amp; checksec ./chall &amp;&amp; strings chall | head</a:t>
-            </a:r>
-          </a:p>
-          <a:p>
-            <a:pPr>
-              <a:spcAft>
-                <a:spcPts val="600"/>
-              </a:spcAft>
-            </a:pPr>
-            <a:r>
-              <a:rPr sz="1500">
-                <a:solidFill>
-                  <a:srgbClr val="22282E"/>
-                </a:solidFill>
-              </a:rPr>
-              <a:t>•  Reproduce el bug localmente y determina la primitiva (overflow, fmt, UAF…).</a:t>
-            </a:r>
-          </a:p>
-          <a:p>
-            <a:pPr>
-              <a:spcAft>
-                <a:spcPts val="600"/>
-              </a:spcAft>
-            </a:pPr>
-            <a:r>
-              <a:rPr sz="1500">
-                <a:solidFill>
-                  <a:srgbClr val="22282E"/>
-                </a:solidFill>
-              </a:rPr>
-              <a:t>•  Usa una plantilla pwntools que sirva local y remoto:</a:t>
-            </a:r>
-          </a:p>
-          <a:p>
-            <a:pPr>
-              <a:spcAft>
-                <a:spcPts val="600"/>
-              </a:spcAft>
-            </a:pPr>
-            <a:r>
-              <a:rPr sz="1500">
-                <a:solidFill>
-                  <a:srgbClr val="22282E"/>
-                </a:solidFill>
-              </a:rPr>
-              <a:t>•  from pwn import</a:t>
-            </a:r>
-          </a:p>
-          <a:p>
-            <a:pPr>
-              <a:spcAft>
-                <a:spcPts val="600"/>
-              </a:spcAft>
-            </a:pPr>
-            <a:r>
-              <a:rPr sz="1500">
-                <a:solidFill>
-                  <a:srgbClr val="22282E"/>
-                </a:solidFill>
-              </a:rPr>
-              <a:t>•  exe = context.binary = ELF("./chall")</a:t>
-            </a:r>
-          </a:p>
-          <a:p>
-            <a:pPr>
-              <a:spcAft>
-                <a:spcPts val="600"/>
-              </a:spcAft>
-            </a:pPr>
-            <a:r>
-              <a:rPr sz="1500">
-                <a:solidFill>
-                  <a:srgbClr val="22282E"/>
-                </a:solidFill>
-              </a:rPr>
-              <a:t>•  def conn():</a:t>
+              <a:t>•  Término — Definición concisa</a:t>
+            </a:r>
+          </a:p>
+          <a:p>
+            <a:pPr>
+              <a:spcAft>
+                <a:spcPts val="600"/>
+              </a:spcAft>
+            </a:pPr>
+            <a:r>
+              <a:rPr sz="1500">
+                <a:solidFill>
+                  <a:srgbClr val="22282E"/>
+                </a:solidFill>
+              </a:rPr>
+              <a:t>•  CTF — Competición de seguridad basada en retos y flags</a:t>
+            </a:r>
+          </a:p>
+          <a:p>
+            <a:pPr>
+              <a:spcAft>
+                <a:spcPts val="600"/>
+              </a:spcAft>
+            </a:pPr>
+            <a:r>
+              <a:rPr sz="1500">
+                <a:solidFill>
+                  <a:srgbClr val="22282E"/>
+                </a:solidFill>
+              </a:rPr>
+              <a:t>•  Flag — Cadena secreta que prueba haber resuelto un reto</a:t>
+            </a:r>
+          </a:p>
+          <a:p>
+            <a:pPr>
+              <a:spcAft>
+                <a:spcPts val="600"/>
+              </a:spcAft>
+            </a:pPr>
+            <a:r>
+              <a:rPr sz="1500">
+                <a:solidFill>
+                  <a:srgbClr val="22282E"/>
+                </a:solidFill>
+              </a:rPr>
+              <a:t>•  Jeopardy — Formato de tablero de retos por categorías</a:t>
+            </a:r>
+          </a:p>
+          <a:p>
+            <a:pPr>
+              <a:spcAft>
+                <a:spcPts val="600"/>
+              </a:spcAft>
+            </a:pPr>
+            <a:r>
+              <a:rPr sz="1500">
+                <a:solidFill>
+                  <a:srgbClr val="22282E"/>
+                </a:solidFill>
+              </a:rPr>
+              <a:t>•  Attack-defense — Formato de parchear los servicios propios y atacar los ajenos</a:t>
+            </a:r>
+          </a:p>
+          <a:p>
+            <a:pPr>
+              <a:spcAft>
+                <a:spcPts val="600"/>
+              </a:spcAft>
+            </a:pPr>
+            <a:r>
+              <a:rPr sz="1500">
+                <a:solidFill>
+                  <a:srgbClr val="22282E"/>
+                </a:solidFill>
+              </a:rPr>
+              <a:t>•  pwn — Categoría de explotación de binarios</a:t>
+            </a:r>
+          </a:p>
+          <a:p>
+            <a:pPr>
+              <a:spcAft>
+                <a:spcPts val="600"/>
+              </a:spcAft>
+            </a:pPr>
+            <a:r>
+              <a:rPr sz="1500">
+                <a:solidFill>
+                  <a:srgbClr val="22282E"/>
+                </a:solidFill>
+              </a:rPr>
+              <a:t>•  rev — Categoría de ingeniería inversa</a:t>
             </a:r>
           </a:p>
         </p:txBody>
@@ -4599,7 +5035,7 @@
                   <a:srgbClr val="0B3D2E"/>
                 </a:solidFill>
               </a:rPr>
-              <a:t>✍️ Ejercicios</a:t>
+              <a:t>🧰 Herramientas y preparación</a:t>
             </a:r>
           </a:p>
         </p:txBody>
@@ -4637,82 +5073,22 @@
                   <a:srgbClr val="22282E"/>
                 </a:solidFill>
               </a:rPr>
-              <a:t>•  Resuelve un reto de picoCTF de la categoría Binary Exploitation y documenta el flujo.</a:t>
-            </a:r>
-          </a:p>
-          <a:p>
-            <a:pPr>
-              <a:spcAft>
-                <a:spcPts val="600"/>
-              </a:spcAft>
-            </a:pPr>
-            <a:r>
-              <a:rPr sz="1500">
-                <a:solidFill>
-                  <a:srgbClr val="22282E"/>
-                </a:solidFill>
-              </a:rPr>
-              <a:t>•  Resuelve un crackme de crackmes.one y publica (para ti) el razonamiento.</a:t>
-            </a:r>
-          </a:p>
-          <a:p>
-            <a:pPr>
-              <a:spcAft>
-                <a:spcPts val="600"/>
-              </a:spcAft>
-            </a:pPr>
-            <a:r>
-              <a:rPr sz="1500">
-                <a:solidFill>
-                  <a:srgbClr val="22282E"/>
-                </a:solidFill>
-              </a:rPr>
-              <a:t>•  Adapta tu plantilla pwntools para gestionar un prompt con sendlineafter.</a:t>
-            </a:r>
-          </a:p>
-          <a:p>
-            <a:pPr>
-              <a:spcAft>
-                <a:spcPts val="600"/>
-              </a:spcAft>
-            </a:pPr>
-            <a:r>
-              <a:rPr sz="1500">
-                <a:solidFill>
-                  <a:srgbClr val="22282E"/>
-                </a:solidFill>
-              </a:rPr>
-              <a:t>•  Identifica la libc de un reto remoto por un leak y ajústala.</a:t>
-            </a:r>
-          </a:p>
-          <a:p>
-            <a:pPr>
-              <a:spcAft>
-                <a:spcPts val="600"/>
-              </a:spcAft>
-            </a:pPr>
-            <a:r>
-              <a:rPr sz="1500">
-                <a:solidFill>
-                  <a:srgbClr val="22282E"/>
-                </a:solidFill>
-              </a:rPr>
-              <a:t>•  Completa dos retos de ROP Emporium (ret2win, split).</a:t>
-            </a:r>
-          </a:p>
-          <a:p>
-            <a:pPr>
-              <a:spcAft>
-                <a:spcPts val="600"/>
-              </a:spcAft>
-            </a:pPr>
-            <a:r>
-              <a:rPr sz="1500">
-                <a:solidFill>
-                  <a:srgbClr val="22282E"/>
-                </a:solidFill>
-              </a:rPr>
-              <a:t>•  Lee un writeup avanzado y resume una técnica nueva que aprendiste.</a:t>
+              <a:t>•  Plataformas legales de práctica: pwn.college, picoCTF, HackTheBox, pwnable.kr,</a:t>
+            </a:r>
+          </a:p>
+          <a:p>
+            <a:pPr>
+              <a:spcAft>
+                <a:spcPts val="600"/>
+              </a:spcAft>
+            </a:pPr>
+            <a:r>
+              <a:rPr sz="1500">
+                <a:solidFill>
+                  <a:srgbClr val="22282E"/>
+                </a:solidFill>
+              </a:rPr>
+              <a:t>•  ROP Emporium, crackmes.one.</a:t>
             </a:r>
           </a:p>
         </p:txBody>
@@ -4763,7 +5139,7 @@
                   <a:srgbClr val="0B3D2E"/>
                 </a:solidFill>
               </a:rPr>
-              <a:t>📝 Reto verificable</a:t>
+              <a:t>🧪 Laboratorio guiado</a:t>
             </a:r>
           </a:p>
         </p:txBody>
@@ -4801,52 +5177,97 @@
                   <a:srgbClr val="22282E"/>
                 </a:solidFill>
               </a:rPr>
-              <a:t>•  Resuelve de principio a fin un reto de pwn con objetivo remoto (de una plataforma de práctica),</a:t>
-            </a:r>
-          </a:p>
-          <a:p>
-            <a:pPr>
-              <a:spcAft>
-                <a:spcPts val="600"/>
-              </a:spcAft>
-            </a:pPr>
-            <a:r>
-              <a:rPr sz="1500">
-                <a:solidFill>
-                  <a:srgbClr val="22282E"/>
-                </a:solidFill>
-              </a:rPr>
-              <a:t>•  obteniendo la flag, y entrega tu exploit + writeup.</a:t>
-            </a:r>
-          </a:p>
-          <a:p>
-            <a:pPr>
-              <a:spcAft>
-                <a:spcPts val="600"/>
-              </a:spcAft>
-            </a:pPr>
-            <a:r>
-              <a:rPr sz="1500">
-                <a:solidFill>
-                  <a:srgbClr val="22282E"/>
-                </a:solidFill>
-              </a:rPr>
-              <a:t>•  Criterio de aceptación: tu exploit.py REMOTE recupera la flag del servidor y tu writeup explica el</a:t>
-            </a:r>
-          </a:p>
-          <a:p>
-            <a:pPr>
-              <a:spcAft>
-                <a:spcPts val="600"/>
-              </a:spcAft>
-            </a:pPr>
-            <a:r>
-              <a:rPr sz="1500">
-                <a:solidFill>
-                  <a:srgbClr val="22282E"/>
-                </a:solidFill>
-              </a:rPr>
-              <a:t>•  bug, la primitiva y la cadena de explotación de forma reproducible.</a:t>
+              <a:t>•  Triage de un reto de pwn descargado:</a:t>
+            </a:r>
+          </a:p>
+          <a:p>
+            <a:pPr>
+              <a:spcAft>
+                <a:spcPts val="600"/>
+              </a:spcAft>
+            </a:pPr>
+            <a:r>
+              <a:rPr sz="1500">
+                <a:solidFill>
+                  <a:srgbClr val="22282E"/>
+                </a:solidFill>
+              </a:rPr>
+              <a:t>•  Reproduce el bug localmente y determina la primitiva (overflow, fmt, UAF…).</a:t>
+            </a:r>
+          </a:p>
+          <a:p>
+            <a:pPr>
+              <a:spcAft>
+                <a:spcPts val="600"/>
+              </a:spcAft>
+            </a:pPr>
+            <a:r>
+              <a:rPr sz="1500">
+                <a:solidFill>
+                  <a:srgbClr val="22282E"/>
+                </a:solidFill>
+              </a:rPr>
+              <a:t>•  Usa una plantilla pwntools que sirva local y remoto:</a:t>
+            </a:r>
+          </a:p>
+          <a:p>
+            <a:pPr>
+              <a:spcAft>
+                <a:spcPts val="600"/>
+              </a:spcAft>
+            </a:pPr>
+            <a:r>
+              <a:rPr sz="1500">
+                <a:solidFill>
+                  <a:srgbClr val="22282E"/>
+                </a:solidFill>
+              </a:rPr>
+              <a:t>•  Desarrolla el exploit local hasta obtener shell/flag; luego lánzalo remoto con python3 exploit.py REMOTE</a:t>
+            </a:r>
+          </a:p>
+          <a:p>
+            <a:pPr>
+              <a:spcAft>
+                <a:spcPts val="600"/>
+              </a:spcAft>
+            </a:pPr>
+            <a:r>
+              <a:rPr sz="1500">
+                <a:solidFill>
+                  <a:srgbClr val="22282E"/>
+                </a:solidFill>
+              </a:rPr>
+              <a:t>•  usando la misma libc que provee el reto.</a:t>
+            </a:r>
+          </a:p>
+          <a:p>
+            <a:pPr>
+              <a:spcAft>
+                <a:spcPts val="600"/>
+              </a:spcAft>
+            </a:pPr>
+            <a:r>
+              <a:rPr sz="1500">
+                <a:solidFill>
+                  <a:srgbClr val="22282E"/>
+                </a:solidFill>
+              </a:rPr>
+              <a:t>•  Reversing: para un reto rev, abre el binario en Ghidra, deduce el algoritmo de validación y</a:t>
+            </a:r>
+          </a:p>
+          <a:p>
+            <a:pPr>
+              <a:spcAft>
+                <a:spcPts val="600"/>
+              </a:spcAft>
+            </a:pPr>
+            <a:r>
+              <a:rPr sz="1500">
+                <a:solidFill>
+                  <a:srgbClr val="22282E"/>
+                </a:solidFill>
+              </a:rPr>
+              <a:t>•  recupera la flag (a veces reimplementando la transformación inversa en Python).</a:t>
             </a:r>
           </a:p>
         </p:txBody>
